--- a/site/clases/parte-2-deep-learning/171-aceleracion-con-gpu/clase-171-aceleracion-con-gpu-presentacion.pptx
+++ b/site/clases/parte-2-deep-learning/171-aceleracion-con-gpu/clase-171-aceleracion-con-gpu-presentacion.pptx
@@ -3272,7 +3272,7 @@
                 </a:solidFill>
                 <a:latin typeface="Segoe UI"/>
               </a:rPr>
-              <a:t>Parte: 2 — Deep Learning · Fuente: Géron, cap. 19 § Using GPUs to Speed Up Computations.  Duración estimada: 60 min.</a:t>
+              <a:t>Parte: 2 — Deep Learning · Fuente: Géron, cap. 19 § Using GPUs to Speed Up Computations.  Duración estimada: 60 min. · Nivel: Avanzado</a:t>
             </a:r>
           </a:p>
         </p:txBody>
@@ -3581,7 +3581,7 @@
                 </a:solidFill>
                 <a:latin typeface="Segoe UI"/>
               </a:rPr>
-              <a:t>Parte: 2 — Deep Learning · Fuente: Géron, cap. 19 § Using GPUs to Speed Up Computations.  Duración estimada: 60 min.</a:t>
+              <a:t>Parte: 2 — Deep Learning · Fuente: Géron, cap. 19 § Using GPUs to Speed Up Computations.  Duración estimada: 60 min. · Nivel: Avanzado</a:t>
             </a:r>
           </a:p>
         </p:txBody>
@@ -4910,7 +4910,292 @@
                 </a:solidFill>
                 <a:latin typeface="Courier New"/>
               </a:rPr>
-              <a:t># Imports y configuración inicial</a:t>
+              <a:t>try:</a:t>
+            </a:r>
+          </a:p>
+          <a:p>
+            <a:pPr>
+              <a:defRPr sz="1200" b="0">
+                <a:solidFill>
+                  <a:srgbClr val="F8FAFC"/>
+                </a:solidFill>
+                <a:latin typeface="Courier New"/>
+              </a:defRPr>
+            </a:pPr>
+            <a:r>
+              <a:rPr sz="1200" b="0">
+                <a:solidFill>
+                  <a:srgbClr val="F8FAFC"/>
+                </a:solidFill>
+                <a:latin typeface="Courier New"/>
+              </a:rPr>
+              <a:t>    import tensorflow as tf</a:t>
+            </a:r>
+          </a:p>
+          <a:p>
+            <a:pPr>
+              <a:defRPr sz="1200" b="0">
+                <a:solidFill>
+                  <a:srgbClr val="F8FAFC"/>
+                </a:solidFill>
+                <a:latin typeface="Courier New"/>
+              </a:defRPr>
+            </a:pPr>
+            <a:r>
+              <a:rPr sz="1200" b="0">
+                <a:solidFill>
+                  <a:srgbClr val="F8FAFC"/>
+                </a:solidFill>
+                <a:latin typeface="Courier New"/>
+              </a:rPr>
+              <a:t>    TF_OK = True</a:t>
+            </a:r>
+          </a:p>
+          <a:p>
+            <a:pPr>
+              <a:defRPr sz="1200" b="0">
+                <a:solidFill>
+                  <a:srgbClr val="F8FAFC"/>
+                </a:solidFill>
+                <a:latin typeface="Courier New"/>
+              </a:defRPr>
+            </a:pPr>
+            <a:r>
+              <a:rPr sz="1200" b="0">
+                <a:solidFill>
+                  <a:srgbClr val="F8FAFC"/>
+                </a:solidFill>
+                <a:latin typeface="Courier New"/>
+              </a:rPr>
+              <a:t>    print("tensorflow", tf.__version__)</a:t>
+            </a:r>
+          </a:p>
+          <a:p>
+            <a:pPr>
+              <a:defRPr sz="1200" b="0">
+                <a:solidFill>
+                  <a:srgbClr val="F8FAFC"/>
+                </a:solidFill>
+                <a:latin typeface="Courier New"/>
+              </a:defRPr>
+            </a:pPr>
+            <a:r>
+              <a:rPr sz="1200" b="0">
+                <a:solidFill>
+                  <a:srgbClr val="F8FAFC"/>
+                </a:solidFill>
+                <a:latin typeface="Courier New"/>
+              </a:rPr>
+              <a:t>except Exception:</a:t>
+            </a:r>
+          </a:p>
+          <a:p>
+            <a:pPr>
+              <a:defRPr sz="1200" b="0">
+                <a:solidFill>
+                  <a:srgbClr val="F8FAFC"/>
+                </a:solidFill>
+                <a:latin typeface="Courier New"/>
+              </a:defRPr>
+            </a:pPr>
+            <a:r>
+              <a:rPr sz="1200" b="0">
+                <a:solidFill>
+                  <a:srgbClr val="F8FAFC"/>
+                </a:solidFill>
+                <a:latin typeface="Courier New"/>
+              </a:rPr>
+              <a:t>    TF_OK = False</a:t>
+            </a:r>
+          </a:p>
+          <a:p>
+            <a:pPr>
+              <a:defRPr sz="1200" b="0">
+                <a:solidFill>
+                  <a:srgbClr val="F8FAFC"/>
+                </a:solidFill>
+                <a:latin typeface="Courier New"/>
+              </a:defRPr>
+            </a:pPr>
+            <a:r>
+              <a:rPr sz="1200" b="0">
+                <a:solidFill>
+                  <a:srgbClr val="F8FAFC"/>
+                </a:solidFill>
+                <a:latin typeface="Courier New"/>
+              </a:rPr>
+              <a:t>    print("tensorflow no instalado -&gt; se muestra la API (no se ejecuta)")</a:t>
+            </a:r>
+          </a:p>
+          <a:p>
+            <a:pPr>
+              <a:defRPr sz="1200" b="0">
+                <a:solidFill>
+                  <a:srgbClr val="F8FAFC"/>
+                </a:solidFill>
+                <a:latin typeface="Courier New"/>
+              </a:defRPr>
+            </a:pPr>
+            <a:r>
+              <a:rPr sz="1200" b="0">
+                <a:solidFill>
+                  <a:srgbClr val="F8FAFC"/>
+                </a:solidFill>
+                <a:latin typeface="Courier New"/>
+              </a:rPr>
+              <a:t> </a:t>
+            </a:r>
+          </a:p>
+          <a:p>
+            <a:pPr>
+              <a:defRPr sz="1200" b="0">
+                <a:solidFill>
+                  <a:srgbClr val="F8FAFC"/>
+                </a:solidFill>
+                <a:latin typeface="Courier New"/>
+              </a:defRPr>
+            </a:pPr>
+            <a:r>
+              <a:rPr sz="1200" b="0">
+                <a:solidFill>
+                  <a:srgbClr val="F8FAFC"/>
+                </a:solidFill>
+                <a:latin typeface="Courier New"/>
+              </a:rPr>
+              <a:t>if TF_OK:</a:t>
+            </a:r>
+          </a:p>
+          <a:p>
+            <a:pPr>
+              <a:defRPr sz="1200" b="0">
+                <a:solidFill>
+                  <a:srgbClr val="F8FAFC"/>
+                </a:solidFill>
+                <a:latin typeface="Courier New"/>
+              </a:defRPr>
+            </a:pPr>
+            <a:r>
+              <a:rPr sz="1200" b="0">
+                <a:solidFill>
+                  <a:srgbClr val="F8FAFC"/>
+                </a:solidFill>
+                <a:latin typeface="Courier New"/>
+              </a:rPr>
+              <a:t>    gpus = tf.config.list_physical_devices("GPU")</a:t>
+            </a:r>
+          </a:p>
+          <a:p>
+            <a:pPr>
+              <a:defRPr sz="1200" b="0">
+                <a:solidFill>
+                  <a:srgbClr val="F8FAFC"/>
+                </a:solidFill>
+                <a:latin typeface="Courier New"/>
+              </a:defRPr>
+            </a:pPr>
+            <a:r>
+              <a:rPr sz="1200" b="0">
+                <a:solidFill>
+                  <a:srgbClr val="F8FAFC"/>
+                </a:solidFill>
+                <a:latin typeface="Courier New"/>
+              </a:rPr>
+              <a:t>    print("GPUs fisicas:", gpus)</a:t>
+            </a:r>
+          </a:p>
+          <a:p>
+            <a:pPr>
+              <a:defRPr sz="1200" b="0">
+                <a:solidFill>
+                  <a:srgbClr val="F8FAFC"/>
+                </a:solidFill>
+                <a:latin typeface="Courier New"/>
+              </a:defRPr>
+            </a:pPr>
+            <a:r>
+              <a:rPr sz="1200" b="0">
+                <a:solidFill>
+                  <a:srgbClr val="F8FAFC"/>
+                </a:solidFill>
+                <a:latin typeface="Courier New"/>
+              </a:rPr>
+              <a:t>    print("GPUs logicas:", tf.config.list_logical_devices("GPU"))</a:t>
+            </a:r>
+          </a:p>
+          <a:p>
+            <a:pPr>
+              <a:defRPr sz="1200" b="0">
+                <a:solidFill>
+                  <a:srgbClr val="F8FAFC"/>
+                </a:solidFill>
+                <a:latin typeface="Courier New"/>
+              </a:defRPr>
+            </a:pPr>
+            <a:r>
+              <a:rPr sz="1200" b="0">
+                <a:solidFill>
+                  <a:srgbClr val="F8FAFC"/>
+                </a:solidFill>
+                <a:latin typeface="Courier New"/>
+              </a:rPr>
+              <a:t>    if not gpus:</a:t>
+            </a:r>
+          </a:p>
+          <a:p>
+            <a:pPr>
+              <a:defRPr sz="1200" b="0">
+                <a:solidFill>
+                  <a:srgbClr val="F8FAFC"/>
+                </a:solidFill>
+                <a:latin typeface="Courier New"/>
+              </a:defRPr>
+            </a:pPr>
+            <a:r>
+              <a:rPr sz="1200" b="0">
+                <a:solidFill>
+                  <a:srgbClr val="F8FAFC"/>
+                </a:solidFill>
+                <a:latin typeface="Courier New"/>
+              </a:rPr>
+              <a:t>        print("(sin GPU: TF corre en CPU; el codigo de abajo es la configuracion correcta)")</a:t>
+            </a:r>
+          </a:p>
+          <a:p>
+            <a:pPr>
+              <a:defRPr sz="1200" b="0">
+                <a:solidFill>
+                  <a:srgbClr val="F8FAFC"/>
+                </a:solidFill>
+                <a:latin typeface="Courier New"/>
+              </a:defRPr>
+            </a:pPr>
+            <a:r>
+              <a:rPr sz="1200" b="0">
+                <a:solidFill>
+                  <a:srgbClr val="F8FAFC"/>
+                </a:solidFill>
+                <a:latin typeface="Courier New"/>
+              </a:rPr>
+              <a:t>else:</a:t>
+            </a:r>
+          </a:p>
+          <a:p>
+            <a:pPr>
+              <a:defRPr sz="1200" b="0">
+                <a:solidFill>
+                  <a:srgbClr val="F8FAFC"/>
+                </a:solidFill>
+                <a:latin typeface="Courier New"/>
+              </a:defRPr>
+            </a:pPr>
+            <a:r>
+              <a:rPr sz="1200" b="0">
+                <a:solidFill>
+                  <a:srgbClr val="F8FAFC"/>
+                </a:solidFill>
+                <a:latin typeface="Courier New"/>
+              </a:rPr>
+              <a:t>    print("tf.config.list_physical_devices('GPU')  /  torch.cuda.is_available()")</a:t>
             </a:r>
           </a:p>
         </p:txBody>
